--- a/public/iAssetsPro-WO-Workflow-Presentation.pptx
+++ b/public/iAssetsPro-WO-Workflow-Presentation.pptx
@@ -3941,7 +3941,7 @@
                 <a:ea typeface="Carlito" pitchFamily="34" charset="-122"/>
                 <a:cs typeface="Carlito" pitchFamily="34" charset="-120"/>
               </a:rPr>
-              <a:t>Enterprise Asset Management Platform · Lightworld Technology</a:t>
+              <a:t>Asset Management Platform · Lightworld Technology</a:t>
             </a:r>
             <a:endParaRPr lang="en-US" sz="731" dirty="0"/>
           </a:p>
